--- a/chat_course/week03_file_transfer/Week03_파일전송_분기지옥.pptx
+++ b/chat_course/week03_file_transfer/Week03_파일전송_분기지옥.pptx
@@ -1390,7 +1390,7 @@
           <a:p>
             <a:fld id="{5BCAD085-E8A6-8845-BD4E-CB4CCA059FC4}" type="datetimeFigureOut">
               <a:rPr lang="en-US" smtClean="0"/>
-              <a:t>7/9/2026</a:t>
+              <a:t>7/23/2026</a:t>
             </a:fld>
             <a:endParaRPr lang="en-US"/>
           </a:p>
@@ -1558,7 +1558,7 @@
           <a:p>
             <a:fld id="{5BCAD085-E8A6-8845-BD4E-CB4CCA059FC4}" type="datetimeFigureOut">
               <a:rPr lang="en-US" smtClean="0"/>
-              <a:t>7/9/2026</a:t>
+              <a:t>7/23/2026</a:t>
             </a:fld>
             <a:endParaRPr lang="en-US"/>
           </a:p>
@@ -1736,7 +1736,7 @@
           <a:p>
             <a:fld id="{5BCAD085-E8A6-8845-BD4E-CB4CCA059FC4}" type="datetimeFigureOut">
               <a:rPr lang="en-US" smtClean="0"/>
-              <a:t>7/9/2026</a:t>
+              <a:t>7/23/2026</a:t>
             </a:fld>
             <a:endParaRPr lang="en-US"/>
           </a:p>
@@ -1904,7 +1904,7 @@
           <a:p>
             <a:fld id="{5BCAD085-E8A6-8845-BD4E-CB4CCA059FC4}" type="datetimeFigureOut">
               <a:rPr lang="en-US" smtClean="0"/>
-              <a:t>7/9/2026</a:t>
+              <a:t>7/23/2026</a:t>
             </a:fld>
             <a:endParaRPr lang="en-US"/>
           </a:p>
@@ -2149,7 +2149,7 @@
           <a:p>
             <a:fld id="{5BCAD085-E8A6-8845-BD4E-CB4CCA059FC4}" type="datetimeFigureOut">
               <a:rPr lang="en-US" smtClean="0"/>
-              <a:t>7/9/2026</a:t>
+              <a:t>7/23/2026</a:t>
             </a:fld>
             <a:endParaRPr lang="en-US"/>
           </a:p>
@@ -2434,7 +2434,7 @@
           <a:p>
             <a:fld id="{5BCAD085-E8A6-8845-BD4E-CB4CCA059FC4}" type="datetimeFigureOut">
               <a:rPr lang="en-US" smtClean="0"/>
-              <a:t>7/9/2026</a:t>
+              <a:t>7/23/2026</a:t>
             </a:fld>
             <a:endParaRPr lang="en-US"/>
           </a:p>
@@ -2853,7 +2853,7 @@
           <a:p>
             <a:fld id="{5BCAD085-E8A6-8845-BD4E-CB4CCA059FC4}" type="datetimeFigureOut">
               <a:rPr lang="en-US" smtClean="0"/>
-              <a:t>7/9/2026</a:t>
+              <a:t>7/23/2026</a:t>
             </a:fld>
             <a:endParaRPr lang="en-US"/>
           </a:p>
@@ -2970,7 +2970,7 @@
           <a:p>
             <a:fld id="{5BCAD085-E8A6-8845-BD4E-CB4CCA059FC4}" type="datetimeFigureOut">
               <a:rPr lang="en-US" smtClean="0"/>
-              <a:t>7/9/2026</a:t>
+              <a:t>7/23/2026</a:t>
             </a:fld>
             <a:endParaRPr lang="en-US"/>
           </a:p>
@@ -3065,7 +3065,7 @@
           <a:p>
             <a:fld id="{5BCAD085-E8A6-8845-BD4E-CB4CCA059FC4}" type="datetimeFigureOut">
               <a:rPr lang="en-US" smtClean="0"/>
-              <a:t>7/9/2026</a:t>
+              <a:t>7/23/2026</a:t>
             </a:fld>
             <a:endParaRPr lang="en-US"/>
           </a:p>
@@ -3340,7 +3340,7 @@
           <a:p>
             <a:fld id="{5BCAD085-E8A6-8845-BD4E-CB4CCA059FC4}" type="datetimeFigureOut">
               <a:rPr lang="en-US" smtClean="0"/>
-              <a:t>7/9/2026</a:t>
+              <a:t>7/23/2026</a:t>
             </a:fld>
             <a:endParaRPr lang="en-US"/>
           </a:p>
@@ -3592,7 +3592,7 @@
           <a:p>
             <a:fld id="{5BCAD085-E8A6-8845-BD4E-CB4CCA059FC4}" type="datetimeFigureOut">
               <a:rPr lang="en-US" smtClean="0"/>
-              <a:t>7/9/2026</a:t>
+              <a:t>7/23/2026</a:t>
             </a:fld>
             <a:endParaRPr lang="en-US"/>
           </a:p>
@@ -3803,7 +3803,7 @@
           <a:p>
             <a:fld id="{5BCAD085-E8A6-8845-BD4E-CB4CCA059FC4}" type="datetimeFigureOut">
               <a:rPr lang="en-US" smtClean="0"/>
-              <a:t>7/9/2026</a:t>
+              <a:t>7/23/2026</a:t>
             </a:fld>
             <a:endParaRPr lang="en-US"/>
           </a:p>
@@ -5398,14 +5398,14 @@
           <p:nvPr>
             <p:extLst>
               <p:ext uri="{D42A27DB-BD31-4B8C-83A1-F6EECF244321}">
-                <p14:modId xmlns:p14="http://schemas.microsoft.com/office/powerpoint/2010/main" val="736868402"/>
+                <p14:modId xmlns:p14="http://schemas.microsoft.com/office/powerpoint/2010/main" val="567148607"/>
               </p:ext>
             </p:extLst>
           </p:nvPr>
         </p:nvGraphicFramePr>
         <p:xfrm>
           <a:off x="1173018" y="4347406"/>
-          <a:ext cx="8128000" cy="1483360"/>
+          <a:ext cx="8128000" cy="2763520"/>
         </p:xfrm>
         <a:graphic>
           <a:graphicData uri="http://schemas.openxmlformats.org/drawingml/2006/table">
@@ -5687,8 +5687,200 @@
                     <a:p>
                       <a:pPr latinLnBrk="1"/>
                       <a:r>
+                        <a:rPr lang="ko-KR" altLang="en-US" dirty="0"/>
+                        <a:t>이모티콘 코드</a:t>
+                      </a:r>
+                    </a:p>
+                  </a:txBody>
+                  <a:tcPr/>
+                </a:tc>
+                <a:tc>
+                  <a:txBody>
+                    <a:bodyPr/>
+                    <a:lstStyle/>
+                    <a:p>
+                      <a:pPr latinLnBrk="1"/>
+                      <a:r>
                         <a:rPr lang="en-US" altLang="ko-KR" dirty="0"/>
-                        <a:t>?</a:t>
+                        <a:t>EMOJI|</a:t>
+                      </a:r>
+                      <a:r>
+                        <a:rPr lang="ko-KR" altLang="en-US" dirty="0"/>
+                        <a:t>코드</a:t>
+                      </a:r>
+                    </a:p>
+                  </a:txBody>
+                  <a:tcPr/>
+                </a:tc>
+                <a:tc>
+                  <a:txBody>
+                    <a:bodyPr/>
+                    <a:lstStyle/>
+                    <a:p>
+                      <a:pPr latinLnBrk="1"/>
+                      <a:r>
+                        <a:rPr lang="ko-KR" altLang="en-US" dirty="0"/>
+                        <a:t>닉네임</a:t>
+                      </a:r>
+                      <a:r>
+                        <a:rPr lang="en-US" altLang="ko-KR" dirty="0"/>
+                        <a:t>: </a:t>
+                      </a:r>
+                      <a:r>
+                        <a:rPr lang="ko-KR" altLang="ko-KR" dirty="0"/>
+                        <a:t>😀</a:t>
+                      </a:r>
+                      <a:endParaRPr lang="ko-KR" altLang="en-US" dirty="0"/>
+                    </a:p>
+                  </a:txBody>
+                  <a:tcPr/>
+                </a:tc>
+                <a:extLst>
+                  <a:ext uri="{0D108BD9-81ED-4DB2-BD59-A6C34878D82A}">
+                    <a16:rowId xmlns:a16="http://schemas.microsoft.com/office/drawing/2014/main" val="1220868463"/>
+                  </a:ext>
+                </a:extLst>
+              </a:tr>
+              <a:tr h="370840">
+                <a:tc>
+                  <a:txBody>
+                    <a:bodyPr/>
+                    <a:lstStyle/>
+                    <a:p>
+                      <a:pPr latinLnBrk="1"/>
+                      <a:r>
+                        <a:rPr lang="ko-KR" altLang="en-US" dirty="0"/>
+                        <a:t>위치</a:t>
+                      </a:r>
+                    </a:p>
+                  </a:txBody>
+                  <a:tcPr/>
+                </a:tc>
+                <a:tc>
+                  <a:txBody>
+                    <a:bodyPr/>
+                    <a:lstStyle/>
+                    <a:p>
+                      <a:pPr latinLnBrk="1"/>
+                      <a:r>
+                        <a:rPr lang="ko-KR" altLang="en-US" dirty="0"/>
+                        <a:t>위도</a:t>
+                      </a:r>
+                      <a:r>
+                        <a:rPr lang="en-US" altLang="ko-KR" dirty="0"/>
+                        <a:t>, </a:t>
+                      </a:r>
+                      <a:r>
+                        <a:rPr lang="ko-KR" altLang="en-US" dirty="0"/>
+                        <a:t>경도</a:t>
+                      </a:r>
+                    </a:p>
+                  </a:txBody>
+                  <a:tcPr/>
+                </a:tc>
+                <a:tc>
+                  <a:txBody>
+                    <a:bodyPr/>
+                    <a:lstStyle/>
+                    <a:p>
+                      <a:pPr latinLnBrk="1"/>
+                      <a:r>
+                        <a:rPr lang="en-US" altLang="ko-KR" dirty="0"/>
+                        <a:t>Loc|</a:t>
+                      </a:r>
+                      <a:r>
+                        <a:rPr lang="ko-KR" altLang="en-US" dirty="0"/>
+                        <a:t>위도</a:t>
+                      </a:r>
+                      <a:r>
+                        <a:rPr lang="en-US" altLang="ko-KR" dirty="0"/>
+                        <a:t>|</a:t>
+                      </a:r>
+                      <a:r>
+                        <a:rPr lang="ko-KR" altLang="en-US" dirty="0"/>
+                        <a:t>경도</a:t>
+                      </a:r>
+                    </a:p>
+                  </a:txBody>
+                  <a:tcPr/>
+                </a:tc>
+                <a:tc>
+                  <a:txBody>
+                    <a:bodyPr/>
+                    <a:lstStyle/>
+                    <a:p>
+                      <a:pPr latinLnBrk="1"/>
+                      <a:r>
+                        <a:rPr lang="ko-KR" altLang="en-US" dirty="0"/>
+                        <a:t>닉네임의 위치</a:t>
+                      </a:r>
+                      <a:r>
+                        <a:rPr lang="en-US" altLang="ko-KR" dirty="0"/>
+                        <a:t>:(</a:t>
+                      </a:r>
+                      <a:r>
+                        <a:rPr lang="ko-KR" altLang="en-US" dirty="0"/>
+                        <a:t>위도</a:t>
+                      </a:r>
+                      <a:r>
+                        <a:rPr lang="en-US" altLang="ko-KR" dirty="0"/>
+                        <a:t>, </a:t>
+                      </a:r>
+                      <a:r>
+                        <a:rPr lang="ko-KR" altLang="en-US" dirty="0"/>
+                        <a:t>경도</a:t>
+                      </a:r>
+                      <a:r>
+                        <a:rPr lang="en-US" altLang="ko-KR" dirty="0"/>
+                        <a:t>)</a:t>
+                      </a:r>
+                      <a:endParaRPr lang="ko-KR" altLang="en-US" dirty="0"/>
+                    </a:p>
+                  </a:txBody>
+                  <a:tcPr/>
+                </a:tc>
+                <a:extLst>
+                  <a:ext uri="{0D108BD9-81ED-4DB2-BD59-A6C34878D82A}">
+                    <a16:rowId xmlns:a16="http://schemas.microsoft.com/office/drawing/2014/main" val="560369254"/>
+                  </a:ext>
+                </a:extLst>
+              </a:tr>
+              <a:tr h="370840">
+                <a:tc>
+                  <a:txBody>
+                    <a:bodyPr/>
+                    <a:lstStyle/>
+                    <a:p>
+                      <a:pPr latinLnBrk="1"/>
+                      <a:r>
+                        <a:rPr lang="ko-KR" altLang="en-US" dirty="0"/>
+                        <a:t>오디오</a:t>
+                      </a:r>
+                    </a:p>
+                  </a:txBody>
+                  <a:tcPr/>
+                </a:tc>
+                <a:tc>
+                  <a:txBody>
+                    <a:bodyPr/>
+                    <a:lstStyle/>
+                    <a:p>
+                      <a:pPr latinLnBrk="1"/>
+                      <a:r>
+                        <a:rPr lang="ko-KR" altLang="en-US" dirty="0"/>
+                        <a:t>파일이름</a:t>
+                      </a:r>
+                      <a:r>
+                        <a:rPr lang="en-US" altLang="ko-KR" dirty="0"/>
+                        <a:t>, base64(</a:t>
+                      </a:r>
+                      <a:r>
+                        <a:rPr lang="ko-KR" altLang="en-US" dirty="0"/>
+                        <a:t>음성</a:t>
+                      </a:r>
+                      <a:r>
+                        <a:rPr lang="en-US" altLang="ko-KR" dirty="0"/>
+                        <a:t>)</a:t>
                       </a:r>
                       <a:endParaRPr lang="ko-KR" altLang="en-US" dirty="0"/>
                     </a:p>
@@ -5703,7 +5895,15 @@
                       <a:pPr latinLnBrk="1"/>
                       <a:r>
                         <a:rPr lang="en-US" altLang="ko-KR" dirty="0"/>
-                        <a:t>?</a:t>
+                        <a:t>AUDIO|</a:t>
+                      </a:r>
+                      <a:r>
+                        <a:rPr lang="ko-KR" altLang="en-US" dirty="0"/>
+                        <a:t>이름</a:t>
+                      </a:r>
+                      <a:r>
+                        <a:rPr lang="en-US" altLang="ko-KR" dirty="0"/>
+                        <a:t>|base64</a:t>
                       </a:r>
                       <a:endParaRPr lang="ko-KR" altLang="en-US" dirty="0"/>
                     </a:p>
@@ -5717,17 +5917,16 @@
                     <a:p>
                       <a:pPr latinLnBrk="1"/>
                       <a:r>
-                        <a:rPr lang="en-US" altLang="ko-KR" dirty="0"/>
-                        <a:t>?</a:t>
+                        <a:rPr lang="ko-KR" altLang="en-US" dirty="0"/>
+                        <a:t>오디오 플레이어 재생</a:t>
                       </a:r>
-                      <a:endParaRPr lang="ko-KR" altLang="en-US" dirty="0"/>
                     </a:p>
                   </a:txBody>
                   <a:tcPr/>
                 </a:tc>
                 <a:extLst>
                   <a:ext uri="{0D108BD9-81ED-4DB2-BD59-A6C34878D82A}">
-                    <a16:rowId xmlns:a16="http://schemas.microsoft.com/office/drawing/2014/main" val="1220868463"/>
+                    <a16:rowId xmlns:a16="http://schemas.microsoft.com/office/drawing/2014/main" val="560143147"/>
                   </a:ext>
                 </a:extLst>
               </a:tr>
